--- a/Presentation Slide.pptx
+++ b/Presentation Slide.pptx
@@ -11,11 +11,14 @@
     <p:sldId id="260" r:id="rId6"/>
     <p:sldId id="261" r:id="rId7"/>
     <p:sldId id="262" r:id="rId8"/>
-    <p:sldId id="263" r:id="rId9"/>
-    <p:sldId id="265" r:id="rId10"/>
-    <p:sldId id="266" r:id="rId11"/>
-    <p:sldId id="267" r:id="rId12"/>
-    <p:sldId id="270" r:id="rId13"/>
+    <p:sldId id="271" r:id="rId9"/>
+    <p:sldId id="272" r:id="rId10"/>
+    <p:sldId id="273" r:id="rId11"/>
+    <p:sldId id="263" r:id="rId12"/>
+    <p:sldId id="265" r:id="rId13"/>
+    <p:sldId id="266" r:id="rId14"/>
+    <p:sldId id="267" r:id="rId15"/>
+    <p:sldId id="270" r:id="rId16"/>
   </p:sldIdLst>
   <p:sldSz cx="12192000" cy="6858000"/>
   <p:notesSz cx="6858000" cy="9144000"/>
@@ -7429,16 +7432,16 @@
           <a:p>
             <a:pPr algn="ctr"/>
             <a:r>
-              <a:rPr lang="en-US" altLang="en-GB" b="1">
+              <a:rPr lang="en-GB" altLang="en-US" b="1">
                 <a:solidFill>
                   <a:schemeClr val="accent1">
                     <a:lumMod val="75000"/>
                   </a:schemeClr>
                 </a:solidFill>
               </a:rPr>
-              <a:t>Conclusion</a:t>
-            </a:r>
-            <a:endParaRPr lang="en-US" altLang="en-GB" b="1">
+              <a:t>Implementation</a:t>
+            </a:r>
+            <a:endParaRPr lang="en-GB" altLang="en-US" b="1">
               <a:solidFill>
                 <a:schemeClr val="accent1">
                   <a:lumMod val="75000"/>
@@ -7450,7 +7453,7 @@
       </p:sp>
       <p:sp>
         <p:nvSpPr>
-          <p:cNvPr id="4" name="Content Placeholder 3"/>
+          <p:cNvPr id="3" name="Content Placeholder 2"/>
           <p:cNvSpPr>
             <a:spLocks noGrp="1"/>
           </p:cNvSpPr>
@@ -7458,91 +7461,123 @@
             <p:ph idx="1"/>
           </p:nvPr>
         </p:nvSpPr>
-        <p:spPr>
-          <a:xfrm>
-            <a:off x="610235" y="1174750"/>
-            <a:ext cx="10972165" cy="4953000"/>
-          </a:xfrm>
-        </p:spPr>
+        <p:spPr/>
         <p:txBody>
           <a:bodyPr/>
           <a:p>
-            <a:pPr marL="0" indent="0">
-              <a:buNone/>
+            <a:endParaRPr lang="en-GB" altLang="en-US"/>
+          </a:p>
+          <a:p>
+            <a:pPr>
+              <a:lnSpc>
+                <a:spcPct val="60000"/>
+              </a:lnSpc>
             </a:pPr>
-            <a:endParaRPr lang="en-US" altLang="en-GB" sz="2800"/>
-          </a:p>
-          <a:p>
-            <a:pPr marL="0" indent="0">
-              <a:buNone/>
+            <a:r>
+              <a:rPr lang="en-US" altLang="en-GB" sz="2400"/>
+              <a:t>Programming Language: Java</a:t>
+            </a:r>
+            <a:r>
+              <a:rPr lang="en-GB" altLang="en-US" sz="2400"/>
+              <a:t>.</a:t>
+            </a:r>
+            <a:endParaRPr lang="en-US" altLang="en-GB" sz="2400"/>
+          </a:p>
+          <a:p>
+            <a:pPr>
+              <a:lnSpc>
+                <a:spcPct val="60000"/>
+              </a:lnSpc>
             </a:pPr>
+            <a:endParaRPr lang="en-US" altLang="en-GB" sz="2400"/>
+          </a:p>
+          <a:p>
+            <a:pPr>
+              <a:lnSpc>
+                <a:spcPct val="60000"/>
+              </a:lnSpc>
+            </a:pPr>
             <a:r>
               <a:rPr lang="en-US" altLang="en-GB" sz="2400"/>
-              <a:t>The medicine reminder application has been developed to make it easier for users</a:t>
+              <a:t>Frontend (UI): XML (Android Studio)</a:t>
             </a:r>
             <a:r>
               <a:rPr lang="en-GB" altLang="en-US" sz="2400"/>
-              <a:t> </a:t>
-            </a:r>
+              <a:t>.</a:t>
+            </a:r>
+            <a:endParaRPr lang="en-US" altLang="en-GB" sz="2400"/>
+          </a:p>
+          <a:p>
+            <a:pPr>
+              <a:lnSpc>
+                <a:spcPct val="60000"/>
+              </a:lnSpc>
+            </a:pPr>
+            <a:endParaRPr lang="en-US" altLang="en-GB" sz="2400"/>
+          </a:p>
+          <a:p>
+            <a:pPr>
+              <a:lnSpc>
+                <a:spcPct val="60000"/>
+              </a:lnSpc>
+            </a:pPr>
             <a:r>
               <a:rPr lang="en-US" altLang="en-GB" sz="2400"/>
-              <a:t>to take their medications</a:t>
+              <a:t>Database: Firebase</a:t>
             </a:r>
             <a:r>
               <a:rPr lang="en-GB" altLang="en-US" sz="2400"/>
-              <a:t>. </a:t>
-            </a:r>
+              <a:t> Database.</a:t>
+            </a:r>
+            <a:endParaRPr lang="en-US" altLang="en-GB" sz="2400"/>
+          </a:p>
+          <a:p>
+            <a:pPr>
+              <a:lnSpc>
+                <a:spcPct val="60000"/>
+              </a:lnSpc>
+            </a:pPr>
+            <a:endParaRPr lang="en-US" altLang="en-GB" sz="2400"/>
+          </a:p>
+          <a:p>
+            <a:pPr>
+              <a:lnSpc>
+                <a:spcPct val="60000"/>
+              </a:lnSpc>
+            </a:pPr>
             <a:r>
               <a:rPr lang="en-US" altLang="en-GB" sz="2400"/>
-              <a:t>By providing timely</a:t>
+              <a:t>Tools: Android Studio, Google Maps API</a:t>
             </a:r>
             <a:r>
               <a:rPr lang="en-GB" altLang="en-US" sz="2400"/>
-              <a:t> </a:t>
-            </a:r>
+              <a:t>.</a:t>
+            </a:r>
+            <a:endParaRPr lang="en-US" altLang="en-GB" sz="2400"/>
+          </a:p>
+          <a:p>
+            <a:pPr>
+              <a:lnSpc>
+                <a:spcPct val="60000"/>
+              </a:lnSpc>
+            </a:pPr>
+            <a:endParaRPr lang="en-US" altLang="en-GB" sz="2400"/>
+          </a:p>
+          <a:p>
+            <a:pPr>
+              <a:lnSpc>
+                <a:spcPct val="60000"/>
+              </a:lnSpc>
+            </a:pPr>
             <a:r>
               <a:rPr lang="en-US" altLang="en-GB" sz="2400"/>
-              <a:t>reminders, dosage information, and an easy-to-use interface, the application aims to</a:t>
+              <a:t>Platform: Android OS</a:t>
             </a:r>
             <a:r>
               <a:rPr lang="en-GB" altLang="en-US" sz="2400"/>
-              <a:t> </a:t>
-            </a:r>
-            <a:r>
-              <a:rPr lang="en-US" altLang="en-GB" sz="2400"/>
-              <a:t>minimize the risk of missed doses, overdose, and medication</a:t>
-            </a:r>
-            <a:r>
-              <a:rPr lang="en-GB" altLang="en-US" sz="2400"/>
-              <a:t> </a:t>
-            </a:r>
-            <a:r>
-              <a:rPr lang="en-US" altLang="en-GB" sz="2400"/>
-              <a:t>mismanagement.</a:t>
-            </a:r>
-            <a:r>
-              <a:rPr lang="en-GB" altLang="en-US" sz="2400"/>
-              <a:t> Therefore,</a:t>
+              <a:t>.</a:t>
             </a:r>
             <a:endParaRPr lang="en-GB" altLang="en-US" sz="2400"/>
-          </a:p>
-          <a:p>
-            <a:pPr marL="0" indent="0">
-              <a:buNone/>
-            </a:pPr>
-            <a:r>
-              <a:rPr lang="en-US" altLang="en-GB" sz="2400"/>
-              <a:t>the system establishes a solid foundation for integrating digital</a:t>
-            </a:r>
-            <a:r>
-              <a:rPr lang="en-GB" altLang="en-US" sz="2400"/>
-              <a:t> </a:t>
-            </a:r>
-            <a:r>
-              <a:rPr lang="en-US" altLang="en-GB" sz="2400"/>
-              <a:t>solutions into healthcare management.</a:t>
-            </a:r>
-            <a:endParaRPr lang="en-US" altLang="en-GB" sz="2400"/>
           </a:p>
         </p:txBody>
       </p:sp>
@@ -7567,6 +7602,469 @@
 </file>
 
 <file path=ppt/slides/slide11.xml><?xml version="1.0" encoding="utf-8"?>
+<p:sld xmlns:a="http://schemas.openxmlformats.org/drawingml/2006/main" xmlns:r="http://schemas.openxmlformats.org/officeDocument/2006/relationships" xmlns:p="http://schemas.openxmlformats.org/presentationml/2006/main">
+  <p:cSld>
+    <p:spTree>
+      <p:nvGrpSpPr>
+        <p:cNvPr id="1" name=""/>
+        <p:cNvGrpSpPr/>
+        <p:nvPr/>
+      </p:nvGrpSpPr>
+      <p:grpSpPr/>
+      <p:sp>
+        <p:nvSpPr>
+          <p:cNvPr id="2" name="Title 1"/>
+          <p:cNvSpPr>
+            <a:spLocks noGrp="1"/>
+          </p:cNvSpPr>
+          <p:nvPr>
+            <p:ph type="title"/>
+          </p:nvPr>
+        </p:nvSpPr>
+        <p:spPr/>
+        <p:txBody>
+          <a:bodyPr/>
+          <a:p>
+            <a:pPr algn="ctr"/>
+            <a:br>
+              <a:rPr lang="en-GB" altLang="en-US" b="1"/>
+            </a:br>
+            <a:r>
+              <a:rPr lang="en-GB" altLang="en-US" b="1">
+                <a:solidFill>
+                  <a:schemeClr val="accent1">
+                    <a:lumMod val="75000"/>
+                  </a:schemeClr>
+                </a:solidFill>
+              </a:rPr>
+              <a:t>Result and Discussion</a:t>
+            </a:r>
+            <a:br>
+              <a:rPr lang="en-GB" altLang="en-US" b="1"/>
+            </a:br>
+            <a:endParaRPr lang="en-GB" altLang="en-US" b="1"/>
+          </a:p>
+        </p:txBody>
+      </p:sp>
+      <p:sp>
+        <p:nvSpPr>
+          <p:cNvPr id="3" name="Content Placeholder 2"/>
+          <p:cNvSpPr>
+            <a:spLocks noGrp="1"/>
+          </p:cNvSpPr>
+          <p:nvPr>
+            <p:ph idx="1"/>
+          </p:nvPr>
+        </p:nvSpPr>
+        <p:spPr/>
+        <p:txBody>
+          <a:bodyPr/>
+          <a:p>
+            <a:pPr>
+              <a:lnSpc>
+                <a:spcPct val="70000"/>
+              </a:lnSpc>
+            </a:pPr>
+            <a:endParaRPr lang="en-US" altLang="en-GB" sz="2800"/>
+          </a:p>
+          <a:p>
+            <a:pPr>
+              <a:lnSpc>
+                <a:spcPct val="70000"/>
+              </a:lnSpc>
+            </a:pPr>
+            <a:r>
+              <a:rPr lang="en-US" altLang="en-GB" sz="2400"/>
+              <a:t>Users received accurate reminders on time.</a:t>
+            </a:r>
+            <a:endParaRPr lang="en-US" altLang="en-GB" sz="2400"/>
+          </a:p>
+          <a:p>
+            <a:pPr>
+              <a:lnSpc>
+                <a:spcPct val="70000"/>
+              </a:lnSpc>
+            </a:pPr>
+            <a:endParaRPr lang="en-US" altLang="en-GB" sz="2400"/>
+          </a:p>
+          <a:p>
+            <a:pPr>
+              <a:lnSpc>
+                <a:spcPct val="70000"/>
+              </a:lnSpc>
+            </a:pPr>
+            <a:r>
+              <a:rPr lang="en-US" altLang="en-GB" sz="2400"/>
+              <a:t>Easy to add and manage multiple medicines.</a:t>
+            </a:r>
+            <a:endParaRPr lang="en-US" altLang="en-GB" sz="2400"/>
+          </a:p>
+          <a:p>
+            <a:pPr>
+              <a:lnSpc>
+                <a:spcPct val="70000"/>
+              </a:lnSpc>
+            </a:pPr>
+            <a:endParaRPr lang="en-US" altLang="en-GB" sz="2400"/>
+          </a:p>
+          <a:p>
+            <a:pPr>
+              <a:lnSpc>
+                <a:spcPct val="70000"/>
+              </a:lnSpc>
+            </a:pPr>
+            <a:r>
+              <a:rPr lang="en-US" altLang="en-GB" sz="2400"/>
+              <a:t>SOS and location features improved safety.</a:t>
+            </a:r>
+            <a:endParaRPr lang="en-US" altLang="en-GB" sz="2400"/>
+          </a:p>
+          <a:p>
+            <a:pPr>
+              <a:lnSpc>
+                <a:spcPct val="70000"/>
+              </a:lnSpc>
+            </a:pPr>
+            <a:endParaRPr lang="en-US" altLang="en-GB" sz="2400"/>
+          </a:p>
+          <a:p>
+            <a:pPr>
+              <a:lnSpc>
+                <a:spcPct val="70000"/>
+              </a:lnSpc>
+            </a:pPr>
+            <a:r>
+              <a:rPr lang="en-US" altLang="en-GB" sz="2400"/>
+              <a:t>Enhanced medication adherence and reliability.</a:t>
+            </a:r>
+            <a:endParaRPr lang="en-US" altLang="en-GB" sz="2400"/>
+          </a:p>
+        </p:txBody>
+      </p:sp>
+    </p:spTree>
+  </p:cSld>
+  <p:clrMapOvr>
+    <a:masterClrMapping/>
+  </p:clrMapOvr>
+  <mc:AlternateContent xmlns:mc="http://schemas.openxmlformats.org/markup-compatibility/2006">
+    <mc:Choice xmlns:p14="http://schemas.microsoft.com/office/powerpoint/2010/main" Requires="p14">
+      <p:transition spd="slow" p14:dur="1000">
+        <p:wedge/>
+      </p:transition>
+    </mc:Choice>
+    <mc:Fallback>
+      <p:transition spd="slow">
+        <p:wedge/>
+      </p:transition>
+    </mc:Fallback>
+  </mc:AlternateContent>
+</p:sld>
+</file>
+
+<file path=ppt/slides/slide12.xml><?xml version="1.0" encoding="utf-8"?>
+<p:sld xmlns:a="http://schemas.openxmlformats.org/drawingml/2006/main" xmlns:r="http://schemas.openxmlformats.org/officeDocument/2006/relationships" xmlns:p="http://schemas.openxmlformats.org/presentationml/2006/main">
+  <p:cSld>
+    <p:spTree>
+      <p:nvGrpSpPr>
+        <p:cNvPr id="1" name=""/>
+        <p:cNvGrpSpPr/>
+        <p:nvPr/>
+      </p:nvGrpSpPr>
+      <p:grpSpPr/>
+      <p:sp>
+        <p:nvSpPr>
+          <p:cNvPr id="2" name="Title 1"/>
+          <p:cNvSpPr>
+            <a:spLocks noGrp="1"/>
+          </p:cNvSpPr>
+          <p:nvPr>
+            <p:ph type="title"/>
+          </p:nvPr>
+        </p:nvSpPr>
+        <p:spPr>
+          <a:xfrm>
+            <a:off x="609600" y="414020"/>
+            <a:ext cx="10972800" cy="582613"/>
+          </a:xfrm>
+        </p:spPr>
+        <p:txBody>
+          <a:bodyPr/>
+          <a:p>
+            <a:pPr algn="ctr"/>
+            <a:r>
+              <a:rPr lang="en-US" altLang="en-GB" b="1">
+                <a:solidFill>
+                  <a:schemeClr val="accent1">
+                    <a:lumMod val="75000"/>
+                  </a:schemeClr>
+                </a:solidFill>
+              </a:rPr>
+              <a:t>Future Works</a:t>
+            </a:r>
+            <a:endParaRPr lang="en-US" altLang="en-GB" b="1">
+              <a:solidFill>
+                <a:schemeClr val="accent1">
+                  <a:lumMod val="75000"/>
+                </a:schemeClr>
+              </a:solidFill>
+            </a:endParaRPr>
+          </a:p>
+        </p:txBody>
+      </p:sp>
+      <p:sp>
+        <p:nvSpPr>
+          <p:cNvPr id="3" name="Content Placeholder 2"/>
+          <p:cNvSpPr>
+            <a:spLocks noGrp="1"/>
+          </p:cNvSpPr>
+          <p:nvPr>
+            <p:ph idx="1"/>
+          </p:nvPr>
+        </p:nvSpPr>
+        <p:spPr/>
+        <p:txBody>
+          <a:bodyPr/>
+          <a:p>
+            <a:endParaRPr lang="en-GB" altLang="en-US"/>
+          </a:p>
+          <a:p>
+            <a:r>
+              <a:rPr lang="en-US" altLang="en-GB" sz="2400"/>
+              <a:t>AI-Based Personalization</a:t>
+            </a:r>
+            <a:r>
+              <a:rPr lang="en-GB" altLang="en-US" sz="2400"/>
+              <a:t>.</a:t>
+            </a:r>
+            <a:endParaRPr lang="en-US" altLang="en-GB" sz="2400"/>
+          </a:p>
+          <a:p>
+            <a:r>
+              <a:rPr lang="en-US" altLang="en-GB" sz="2400"/>
+              <a:t>Multi-Language Support</a:t>
+            </a:r>
+            <a:r>
+              <a:rPr lang="en-GB" altLang="en-US" sz="2400"/>
+              <a:t>.</a:t>
+            </a:r>
+            <a:endParaRPr lang="en-US" altLang="en-GB" sz="2400"/>
+          </a:p>
+          <a:p>
+            <a:r>
+              <a:rPr lang="en-US" altLang="en-GB" sz="2400"/>
+              <a:t>OCR</a:t>
+            </a:r>
+            <a:r>
+              <a:rPr lang="en-GB" altLang="en-US" sz="2400"/>
+              <a:t>(Optical Character Recognition)</a:t>
+            </a:r>
+            <a:r>
+              <a:rPr lang="en-US" altLang="en-GB" sz="2400"/>
+              <a:t> Implementation</a:t>
+            </a:r>
+            <a:r>
+              <a:rPr lang="en-GB" altLang="en-US" sz="2400"/>
+              <a:t>.</a:t>
+            </a:r>
+            <a:endParaRPr lang="en-GB" altLang="en-US" sz="2400"/>
+          </a:p>
+          <a:p>
+            <a:r>
+              <a:rPr lang="en-US" altLang="en-GB" sz="2400"/>
+              <a:t>Doctors Appointment</a:t>
+            </a:r>
+            <a:r>
+              <a:rPr lang="en-GB" altLang="en-US" sz="2400"/>
+              <a:t>.</a:t>
+            </a:r>
+            <a:endParaRPr lang="en-GB" altLang="en-US" sz="2400"/>
+          </a:p>
+        </p:txBody>
+      </p:sp>
+    </p:spTree>
+  </p:cSld>
+  <p:clrMapOvr>
+    <a:masterClrMapping/>
+  </p:clrMapOvr>
+  <mc:AlternateContent xmlns:mc="http://schemas.openxmlformats.org/markup-compatibility/2006">
+    <mc:Choice xmlns:p14="http://schemas.microsoft.com/office/powerpoint/2010/main" Requires="p14">
+      <p:transition spd="slow" p14:dur="1000">
+        <p:wedge/>
+      </p:transition>
+    </mc:Choice>
+    <mc:Fallback>
+      <p:transition spd="slow">
+        <p:wedge/>
+      </p:transition>
+    </mc:Fallback>
+  </mc:AlternateContent>
+</p:sld>
+</file>
+
+<file path=ppt/slides/slide13.xml><?xml version="1.0" encoding="utf-8"?>
+<p:sld xmlns:a="http://schemas.openxmlformats.org/drawingml/2006/main" xmlns:r="http://schemas.openxmlformats.org/officeDocument/2006/relationships" xmlns:p="http://schemas.openxmlformats.org/presentationml/2006/main">
+  <p:cSld>
+    <p:spTree>
+      <p:nvGrpSpPr>
+        <p:cNvPr id="1" name=""/>
+        <p:cNvGrpSpPr/>
+        <p:nvPr/>
+      </p:nvGrpSpPr>
+      <p:grpSpPr/>
+      <p:sp>
+        <p:nvSpPr>
+          <p:cNvPr id="2" name="Title 1"/>
+          <p:cNvSpPr>
+            <a:spLocks noGrp="1"/>
+          </p:cNvSpPr>
+          <p:nvPr>
+            <p:ph type="title"/>
+          </p:nvPr>
+        </p:nvSpPr>
+        <p:spPr/>
+        <p:txBody>
+          <a:bodyPr/>
+          <a:p>
+            <a:pPr algn="ctr"/>
+            <a:r>
+              <a:rPr lang="en-US" altLang="en-GB" b="1">
+                <a:solidFill>
+                  <a:schemeClr val="accent1">
+                    <a:lumMod val="75000"/>
+                  </a:schemeClr>
+                </a:solidFill>
+              </a:rPr>
+              <a:t>Conclusion</a:t>
+            </a:r>
+            <a:endParaRPr lang="en-US" altLang="en-GB" b="1">
+              <a:solidFill>
+                <a:schemeClr val="accent1">
+                  <a:lumMod val="75000"/>
+                </a:schemeClr>
+              </a:solidFill>
+            </a:endParaRPr>
+          </a:p>
+        </p:txBody>
+      </p:sp>
+      <p:sp>
+        <p:nvSpPr>
+          <p:cNvPr id="4" name="Content Placeholder 3"/>
+          <p:cNvSpPr>
+            <a:spLocks noGrp="1"/>
+          </p:cNvSpPr>
+          <p:nvPr>
+            <p:ph idx="1"/>
+          </p:nvPr>
+        </p:nvSpPr>
+        <p:spPr>
+          <a:xfrm>
+            <a:off x="610235" y="1174750"/>
+            <a:ext cx="10972165" cy="4953000"/>
+          </a:xfrm>
+        </p:spPr>
+        <p:txBody>
+          <a:bodyPr/>
+          <a:p>
+            <a:pPr marL="0" indent="0">
+              <a:buNone/>
+            </a:pPr>
+            <a:endParaRPr lang="en-US" altLang="en-GB" sz="2800"/>
+          </a:p>
+          <a:p>
+            <a:pPr marL="0" indent="0">
+              <a:buNone/>
+            </a:pPr>
+            <a:r>
+              <a:rPr lang="en-US" altLang="en-GB" sz="2400"/>
+              <a:t>The medicine reminder application has been developed to make it easier for users</a:t>
+            </a:r>
+            <a:r>
+              <a:rPr lang="en-GB" altLang="en-US" sz="2400"/>
+              <a:t> </a:t>
+            </a:r>
+            <a:r>
+              <a:rPr lang="en-US" altLang="en-GB" sz="2400"/>
+              <a:t>to take their medications</a:t>
+            </a:r>
+            <a:r>
+              <a:rPr lang="en-GB" altLang="en-US" sz="2400"/>
+              <a:t>. </a:t>
+            </a:r>
+            <a:r>
+              <a:rPr lang="en-US" altLang="en-GB" sz="2400"/>
+              <a:t>By providing timely</a:t>
+            </a:r>
+            <a:r>
+              <a:rPr lang="en-GB" altLang="en-US" sz="2400"/>
+              <a:t> </a:t>
+            </a:r>
+            <a:r>
+              <a:rPr lang="en-US" altLang="en-GB" sz="2400"/>
+              <a:t>reminders, dosage information, and an easy-to-use interface, the application aims to</a:t>
+            </a:r>
+            <a:r>
+              <a:rPr lang="en-GB" altLang="en-US" sz="2400"/>
+              <a:t> </a:t>
+            </a:r>
+            <a:r>
+              <a:rPr lang="en-US" altLang="en-GB" sz="2400"/>
+              <a:t>minimize the risk of missed doses, overdose, and medication</a:t>
+            </a:r>
+            <a:r>
+              <a:rPr lang="en-GB" altLang="en-US" sz="2400"/>
+              <a:t> </a:t>
+            </a:r>
+            <a:r>
+              <a:rPr lang="en-US" altLang="en-GB" sz="2400"/>
+              <a:t>mismanagement.</a:t>
+            </a:r>
+            <a:r>
+              <a:rPr lang="en-GB" altLang="en-US" sz="2400"/>
+              <a:t> Therefore,</a:t>
+            </a:r>
+            <a:endParaRPr lang="en-GB" altLang="en-US" sz="2400"/>
+          </a:p>
+          <a:p>
+            <a:pPr marL="0" indent="0">
+              <a:buNone/>
+            </a:pPr>
+            <a:r>
+              <a:rPr lang="en-US" altLang="en-GB" sz="2400"/>
+              <a:t>the system establishes a solid foundation for integrating digital</a:t>
+            </a:r>
+            <a:r>
+              <a:rPr lang="en-GB" altLang="en-US" sz="2400"/>
+              <a:t> </a:t>
+            </a:r>
+            <a:r>
+              <a:rPr lang="en-US" altLang="en-GB" sz="2400"/>
+              <a:t>solutions into healthcare management.</a:t>
+            </a:r>
+            <a:endParaRPr lang="en-US" altLang="en-GB" sz="2400"/>
+          </a:p>
+        </p:txBody>
+      </p:sp>
+    </p:spTree>
+  </p:cSld>
+  <p:clrMapOvr>
+    <a:masterClrMapping/>
+  </p:clrMapOvr>
+  <mc:AlternateContent xmlns:mc="http://schemas.openxmlformats.org/markup-compatibility/2006">
+    <mc:Choice xmlns:p14="http://schemas.microsoft.com/office/powerpoint/2010/main" Requires="p14">
+      <p:transition spd="slow" p14:dur="1000">
+        <p:wedge/>
+      </p:transition>
+    </mc:Choice>
+    <mc:Fallback>
+      <p:transition spd="slow">
+        <p:wedge/>
+      </p:transition>
+    </mc:Fallback>
+  </mc:AlternateContent>
+</p:sld>
+</file>
+
+<file path=ppt/slides/slide14.xml><?xml version="1.0" encoding="utf-8"?>
 <p:sld xmlns:a="http://schemas.openxmlformats.org/drawingml/2006/main" xmlns:r="http://schemas.openxmlformats.org/officeDocument/2006/relationships" xmlns:p="http://schemas.openxmlformats.org/presentationml/2006/main">
   <p:cSld>
     <p:spTree>
@@ -7721,7 +8219,7 @@
             </a:pPr>
             <a:r>
               <a:rPr lang="en-GB" altLang="en-US"/>
-              <a:t>Gazi Tamzeed Hossain</a:t>
+              <a:t>Gazi Tamzeed Hossain.</a:t>
             </a:r>
             <a:endParaRPr lang="en-GB" altLang="en-US"/>
           </a:p>
@@ -8352,7 +8850,7 @@
                   </a:schemeClr>
                 </a:solidFill>
               </a:rPr>
-              <a:t>Implementation</a:t>
+              <a:t>User Interfaces (UI)</a:t>
             </a:r>
             <a:endParaRPr lang="en-GB" altLang="en-US" b="1">
               <a:solidFill>
@@ -8364,136 +8862,56 @@
           </a:p>
         </p:txBody>
       </p:sp>
-      <p:sp>
-        <p:nvSpPr>
-          <p:cNvPr id="3" name="Content Placeholder 2"/>
-          <p:cNvSpPr>
-            <a:spLocks noGrp="1"/>
-          </p:cNvSpPr>
+      <p:pic>
+        <p:nvPicPr>
+          <p:cNvPr id="4" name="Content Placeholder 3" descr="login"/>
+          <p:cNvPicPr>
+            <a:picLocks noChangeAspect="1"/>
+          </p:cNvPicPr>
           <p:nvPr>
             <p:ph idx="1"/>
           </p:nvPr>
-        </p:nvSpPr>
-        <p:spPr/>
-        <p:txBody>
-          <a:bodyPr/>
-          <a:p>
-            <a:endParaRPr lang="en-GB" altLang="en-US"/>
-          </a:p>
-          <a:p>
-            <a:pPr>
-              <a:lnSpc>
-                <a:spcPct val="60000"/>
-              </a:lnSpc>
-            </a:pPr>
-            <a:r>
-              <a:rPr lang="en-US" altLang="en-GB" sz="2400"/>
-              <a:t>Programming Language: Java</a:t>
-            </a:r>
-            <a:r>
-              <a:rPr lang="en-GB" altLang="en-US" sz="2400"/>
-              <a:t>.</a:t>
-            </a:r>
-            <a:endParaRPr lang="en-US" altLang="en-GB" sz="2400"/>
-          </a:p>
-          <a:p>
-            <a:pPr>
-              <a:lnSpc>
-                <a:spcPct val="60000"/>
-              </a:lnSpc>
-            </a:pPr>
-            <a:endParaRPr lang="en-US" altLang="en-GB" sz="2400"/>
-          </a:p>
-          <a:p>
-            <a:pPr>
-              <a:lnSpc>
-                <a:spcPct val="60000"/>
-              </a:lnSpc>
-            </a:pPr>
-            <a:r>
-              <a:rPr lang="en-US" altLang="en-GB" sz="2400"/>
-              <a:t>Frontend (UI): XML (Android Studio)</a:t>
-            </a:r>
-            <a:r>
-              <a:rPr lang="en-GB" altLang="en-US" sz="2400"/>
-              <a:t>.</a:t>
-            </a:r>
-            <a:endParaRPr lang="en-US" altLang="en-GB" sz="2400"/>
-          </a:p>
-          <a:p>
-            <a:pPr>
-              <a:lnSpc>
-                <a:spcPct val="60000"/>
-              </a:lnSpc>
-            </a:pPr>
-            <a:endParaRPr lang="en-US" altLang="en-GB" sz="2400"/>
-          </a:p>
-          <a:p>
-            <a:pPr>
-              <a:lnSpc>
-                <a:spcPct val="60000"/>
-              </a:lnSpc>
-            </a:pPr>
-            <a:r>
-              <a:rPr lang="en-US" altLang="en-GB" sz="2400"/>
-              <a:t>Database: Firebase</a:t>
-            </a:r>
-            <a:r>
-              <a:rPr lang="en-GB" altLang="en-US" sz="2400"/>
-              <a:t> Database.</a:t>
-            </a:r>
-            <a:endParaRPr lang="en-US" altLang="en-GB" sz="2400"/>
-          </a:p>
-          <a:p>
-            <a:pPr>
-              <a:lnSpc>
-                <a:spcPct val="60000"/>
-              </a:lnSpc>
-            </a:pPr>
-            <a:endParaRPr lang="en-US" altLang="en-GB" sz="2400"/>
-          </a:p>
-          <a:p>
-            <a:pPr>
-              <a:lnSpc>
-                <a:spcPct val="60000"/>
-              </a:lnSpc>
-            </a:pPr>
-            <a:r>
-              <a:rPr lang="en-US" altLang="en-GB" sz="2400"/>
-              <a:t>Tools: Android Studio, Google Maps API</a:t>
-            </a:r>
-            <a:r>
-              <a:rPr lang="en-GB" altLang="en-US" sz="2400"/>
-              <a:t>.</a:t>
-            </a:r>
-            <a:endParaRPr lang="en-US" altLang="en-GB" sz="2400"/>
-          </a:p>
-          <a:p>
-            <a:pPr>
-              <a:lnSpc>
-                <a:spcPct val="60000"/>
-              </a:lnSpc>
-            </a:pPr>
-            <a:endParaRPr lang="en-US" altLang="en-GB" sz="2400"/>
-          </a:p>
-          <a:p>
-            <a:pPr>
-              <a:lnSpc>
-                <a:spcPct val="60000"/>
-              </a:lnSpc>
-            </a:pPr>
-            <a:r>
-              <a:rPr lang="en-US" altLang="en-GB" sz="2400"/>
-              <a:t>Platform: Android OS</a:t>
-            </a:r>
-            <a:r>
-              <a:rPr lang="en-GB" altLang="en-US" sz="2400"/>
-              <a:t>.</a:t>
-            </a:r>
-            <a:endParaRPr lang="en-GB" altLang="en-US" sz="2400"/>
-          </a:p>
-        </p:txBody>
-      </p:sp>
+        </p:nvPicPr>
+        <p:blipFill>
+          <a:blip r:embed="rId1"/>
+          <a:stretch>
+            <a:fillRect/>
+          </a:stretch>
+        </p:blipFill>
+        <p:spPr>
+          <a:xfrm>
+            <a:off x="2421890" y="1395095"/>
+            <a:ext cx="2504440" cy="4394200"/>
+          </a:xfrm>
+          <a:prstGeom prst="rect">
+            <a:avLst/>
+          </a:prstGeom>
+        </p:spPr>
+      </p:pic>
+      <p:pic>
+        <p:nvPicPr>
+          <p:cNvPr id="5" name="Picture 4" descr="medicine"/>
+          <p:cNvPicPr>
+            <a:picLocks noChangeAspect="1"/>
+          </p:cNvPicPr>
+          <p:nvPr/>
+        </p:nvPicPr>
+        <p:blipFill>
+          <a:blip r:embed="rId2"/>
+          <a:stretch>
+            <a:fillRect/>
+          </a:stretch>
+        </p:blipFill>
+        <p:spPr>
+          <a:xfrm>
+            <a:off x="6260465" y="1395095"/>
+            <a:ext cx="2466975" cy="4396740"/>
+          </a:xfrm>
+          <a:prstGeom prst="rect">
+            <a:avLst/>
+          </a:prstGeom>
+        </p:spPr>
+      </p:pic>
     </p:spTree>
   </p:cSld>
   <p:clrMapOvr>
@@ -8539,9 +8957,6 @@
           <a:bodyPr/>
           <a:p>
             <a:pPr algn="ctr"/>
-            <a:br>
-              <a:rPr lang="en-GB" altLang="en-US" b="1"/>
-            </a:br>
             <a:r>
               <a:rPr lang="en-GB" altLang="en-US" b="1">
                 <a:solidFill>
@@ -8549,111 +8964,62 @@
                     <a:lumMod val="75000"/>
                   </a:schemeClr>
                 </a:solidFill>
+                <a:sym typeface="+mn-ea"/>
               </a:rPr>
-              <a:t>Result and Discussion</a:t>
-            </a:r>
-            <a:br>
-              <a:rPr lang="en-GB" altLang="en-US" b="1"/>
-            </a:br>
-            <a:endParaRPr lang="en-GB" altLang="en-US" b="1"/>
+              <a:t>User Interfaces (UI)(Cont’d)</a:t>
+            </a:r>
+            <a:endParaRPr lang="en-GB" altLang="en-US"/>
           </a:p>
         </p:txBody>
       </p:sp>
-      <p:sp>
-        <p:nvSpPr>
-          <p:cNvPr id="3" name="Content Placeholder 2"/>
-          <p:cNvSpPr>
-            <a:spLocks noGrp="1"/>
-          </p:cNvSpPr>
+      <p:pic>
+        <p:nvPicPr>
+          <p:cNvPr id="10" name="Picture 9"/>
+          <p:cNvPicPr/>
+          <p:nvPr/>
+        </p:nvPicPr>
+        <p:blipFill>
+          <a:blip r:embed="rId1"/>
+          <a:stretch>
+            <a:fillRect/>
+          </a:stretch>
+        </p:blipFill>
+        <p:spPr>
+          <a:xfrm>
+            <a:off x="6558280" y="1450340"/>
+            <a:ext cx="2295525" cy="4232275"/>
+          </a:xfrm>
+          <a:prstGeom prst="rect">
+            <a:avLst/>
+          </a:prstGeom>
+        </p:spPr>
+      </p:pic>
+      <p:pic>
+        <p:nvPicPr>
+          <p:cNvPr id="12" name="Content Placeholder 11"/>
+          <p:cNvPicPr>
+            <a:picLocks noChangeAspect="1"/>
+          </p:cNvPicPr>
           <p:nvPr>
             <p:ph idx="1"/>
           </p:nvPr>
-        </p:nvSpPr>
-        <p:spPr/>
-        <p:txBody>
-          <a:bodyPr/>
-          <a:p>
-            <a:pPr>
-              <a:lnSpc>
-                <a:spcPct val="70000"/>
-              </a:lnSpc>
-            </a:pPr>
-            <a:endParaRPr lang="en-US" altLang="en-GB" sz="2800"/>
-          </a:p>
-          <a:p>
-            <a:pPr>
-              <a:lnSpc>
-                <a:spcPct val="70000"/>
-              </a:lnSpc>
-            </a:pPr>
-            <a:r>
-              <a:rPr lang="en-US" altLang="en-GB" sz="2400"/>
-              <a:t>Users received accurate reminders on time.</a:t>
-            </a:r>
-            <a:endParaRPr lang="en-US" altLang="en-GB" sz="2400"/>
-          </a:p>
-          <a:p>
-            <a:pPr>
-              <a:lnSpc>
-                <a:spcPct val="70000"/>
-              </a:lnSpc>
-            </a:pPr>
-            <a:endParaRPr lang="en-US" altLang="en-GB" sz="2400"/>
-          </a:p>
-          <a:p>
-            <a:pPr>
-              <a:lnSpc>
-                <a:spcPct val="70000"/>
-              </a:lnSpc>
-            </a:pPr>
-            <a:r>
-              <a:rPr lang="en-US" altLang="en-GB" sz="2400"/>
-              <a:t>Easy to add and manage multiple medicines.</a:t>
-            </a:r>
-            <a:endParaRPr lang="en-US" altLang="en-GB" sz="2400"/>
-          </a:p>
-          <a:p>
-            <a:pPr>
-              <a:lnSpc>
-                <a:spcPct val="70000"/>
-              </a:lnSpc>
-            </a:pPr>
-            <a:endParaRPr lang="en-US" altLang="en-GB" sz="2400"/>
-          </a:p>
-          <a:p>
-            <a:pPr>
-              <a:lnSpc>
-                <a:spcPct val="70000"/>
-              </a:lnSpc>
-            </a:pPr>
-            <a:r>
-              <a:rPr lang="en-US" altLang="en-GB" sz="2400"/>
-              <a:t>SOS and location features improved safety.</a:t>
-            </a:r>
-            <a:endParaRPr lang="en-US" altLang="en-GB" sz="2400"/>
-          </a:p>
-          <a:p>
-            <a:pPr>
-              <a:lnSpc>
-                <a:spcPct val="70000"/>
-              </a:lnSpc>
-            </a:pPr>
-            <a:endParaRPr lang="en-US" altLang="en-GB" sz="2400"/>
-          </a:p>
-          <a:p>
-            <a:pPr>
-              <a:lnSpc>
-                <a:spcPct val="70000"/>
-              </a:lnSpc>
-            </a:pPr>
-            <a:r>
-              <a:rPr lang="en-US" altLang="en-GB" sz="2400"/>
-              <a:t>Enhanced medication adherence and reliability.</a:t>
-            </a:r>
-            <a:endParaRPr lang="en-US" altLang="en-GB" sz="2400"/>
-          </a:p>
-        </p:txBody>
-      </p:sp>
+        </p:nvPicPr>
+        <p:blipFill>
+          <a:blip r:embed="rId2"/>
+          <a:stretch>
+            <a:fillRect/>
+          </a:stretch>
+        </p:blipFill>
+        <p:spPr>
+          <a:xfrm>
+            <a:off x="2632075" y="1450340"/>
+            <a:ext cx="2378075" cy="4335145"/>
+          </a:xfrm>
+          <a:prstGeom prst="rect">
+            <a:avLst/>
+          </a:prstGeom>
+        </p:spPr>
+      </p:pic>
     </p:spTree>
   </p:cSld>
   <p:clrMapOvr>
@@ -8694,106 +9060,80 @@
             <p:ph type="title"/>
           </p:nvPr>
         </p:nvSpPr>
-        <p:spPr>
-          <a:xfrm>
-            <a:off x="609600" y="414020"/>
-            <a:ext cx="10972800" cy="582613"/>
-          </a:xfrm>
-        </p:spPr>
+        <p:spPr/>
         <p:txBody>
           <a:bodyPr/>
           <a:p>
             <a:pPr algn="ctr"/>
             <a:r>
-              <a:rPr lang="en-US" altLang="en-GB" b="1">
+              <a:rPr lang="en-GB" altLang="en-US" b="1">
                 <a:solidFill>
                   <a:schemeClr val="accent1">
                     <a:lumMod val="75000"/>
                   </a:schemeClr>
                 </a:solidFill>
+                <a:sym typeface="+mn-ea"/>
               </a:rPr>
-              <a:t>Future Works</a:t>
-            </a:r>
-            <a:endParaRPr lang="en-US" altLang="en-GB" b="1">
-              <a:solidFill>
-                <a:schemeClr val="accent1">
-                  <a:lumMod val="75000"/>
-                </a:schemeClr>
-              </a:solidFill>
-            </a:endParaRPr>
+              <a:t>User Interfaces (UI)(Cont’d)</a:t>
+            </a:r>
+            <a:endParaRPr lang="en-GB" altLang="en-US"/>
           </a:p>
         </p:txBody>
       </p:sp>
-      <p:sp>
-        <p:nvSpPr>
-          <p:cNvPr id="3" name="Content Placeholder 2"/>
-          <p:cNvSpPr>
-            <a:spLocks noGrp="1"/>
-          </p:cNvSpPr>
+      <p:pic>
+        <p:nvPicPr>
+          <p:cNvPr id="9" name="Content Placeholder 8" descr="sos"/>
+          <p:cNvPicPr>
+            <a:picLocks noChangeAspect="1"/>
+          </p:cNvPicPr>
           <p:nvPr>
             <p:ph idx="1"/>
           </p:nvPr>
-        </p:nvSpPr>
-        <p:spPr/>
-        <p:txBody>
-          <a:bodyPr/>
-          <a:p>
-            <a:endParaRPr lang="en-GB" altLang="en-US"/>
-          </a:p>
-          <a:p>
-            <a:r>
-              <a:rPr lang="en-US" altLang="en-GB" sz="2400"/>
-              <a:t>AI-Based Personalization</a:t>
-            </a:r>
-            <a:r>
-              <a:rPr lang="en-GB" altLang="en-US" sz="2400"/>
-              <a:t>.</a:t>
-            </a:r>
-            <a:endParaRPr lang="en-US" altLang="en-GB" sz="2400"/>
-          </a:p>
-          <a:p>
-            <a:r>
-              <a:rPr lang="en-US" altLang="en-GB" sz="2400"/>
-              <a:t>Multi-Language Support</a:t>
-            </a:r>
-            <a:r>
-              <a:rPr lang="en-GB" altLang="en-US" sz="2400"/>
-              <a:t>.</a:t>
-            </a:r>
-            <a:endParaRPr lang="en-US" altLang="en-GB" sz="2400"/>
-          </a:p>
-          <a:p>
-            <a:r>
-              <a:rPr lang="en-US" altLang="en-GB" sz="2400"/>
-              <a:t>OCR</a:t>
-            </a:r>
-            <a:r>
-              <a:rPr lang="en-GB" altLang="en-US" sz="2400"/>
-              <a:t>(Optical Character Recognition)</a:t>
-            </a:r>
-            <a:r>
-              <a:rPr lang="en-US" altLang="en-GB" sz="2400"/>
-              <a:t> Implementation</a:t>
-            </a:r>
-            <a:r>
-              <a:rPr lang="en-GB" altLang="en-US" sz="2400"/>
-              <a:t>.</a:t>
-            </a:r>
-            <a:endParaRPr lang="en-GB" altLang="en-US" sz="2400"/>
-          </a:p>
-          <a:p>
-            <a:r>
-              <a:rPr lang="en-US" altLang="en-GB" sz="2400"/>
-              <a:t>Doctors Appointment</a:t>
-            </a:r>
-            <a:r>
-              <a:rPr lang="en-GB" altLang="en-US" sz="2400"/>
-              <a:t>.</a:t>
-            </a:r>
-            <a:endParaRPr lang="en-GB" altLang="en-US" sz="2400"/>
-          </a:p>
-        </p:txBody>
-      </p:sp>
+        </p:nvPicPr>
+        <p:blipFill>
+          <a:blip r:embed="rId1"/>
+          <a:stretch>
+            <a:fillRect/>
+          </a:stretch>
+        </p:blipFill>
+        <p:spPr>
+          <a:xfrm>
+            <a:off x="2605405" y="1325880"/>
+            <a:ext cx="2296160" cy="4622165"/>
+          </a:xfrm>
+          <a:prstGeom prst="rect">
+            <a:avLst/>
+          </a:prstGeom>
+          <a:noFill/>
+          <a:ln w="9525">
+            <a:noFill/>
+          </a:ln>
+        </p:spPr>
+      </p:pic>
+      <p:pic>
+        <p:nvPicPr>
+          <p:cNvPr id="5" name="Picture 4" descr="ffff"/>
+          <p:cNvPicPr>
+            <a:picLocks noChangeAspect="1"/>
+          </p:cNvPicPr>
+          <p:nvPr/>
+        </p:nvPicPr>
+        <p:blipFill>
+          <a:blip r:embed="rId2"/>
+          <a:stretch>
+            <a:fillRect/>
+          </a:stretch>
+        </p:blipFill>
+        <p:spPr>
+          <a:xfrm>
+            <a:off x="6400165" y="1325880"/>
+            <a:ext cx="2304415" cy="4458335"/>
+          </a:xfrm>
+          <a:prstGeom prst="rect">
+            <a:avLst/>
+          </a:prstGeom>
+        </p:spPr>
+      </p:pic>
     </p:spTree>
   </p:cSld>
   <p:clrMapOvr>
